--- a/Topic_E/Exam_Practice/TE-L11_Writing_Workshop_Topic_E_Integrated_Communication_Workshop.pptx
+++ b/Topic_E/Exam_Practice/TE-L11_Writing_Workshop_Topic_E_Integrated_Communication_Workshop.pptx
@@ -784,7 +784,11 @@
           <a:lstStyle/>
           <a:p>
             <a:r>
-              <a:rPr lang="en-US" dirty="0"/>
+              <a:rPr lang="ar-SA" dirty="0">
+                <a:latin typeface="Amiri" pitchFamily="2" charset="-78"/>
+                <a:ea typeface="Amiri" pitchFamily="2" charset="-78"/>
+                <a:cs typeface="Amiri" pitchFamily="2" charset="-78"/>
+              </a:rPr>
               <a:t>Q3 (3 min to choose and read). Title (أ) suits Core and Develop; title (ب) suits Stretch.</a:t>
             </a:r>
             <a:endParaRPr lang="en-US" dirty="0"/>
@@ -1403,7 +1407,11 @@
           <a:lstStyle/>
           <a:p>
             <a:r>
-              <a:rPr lang="en-US" dirty="0"/>
+              <a:rPr lang="ar-SA" dirty="0">
+                <a:latin typeface="Amiri" pitchFamily="2" charset="-78"/>
+                <a:ea typeface="Amiri" pitchFamily="2" charset="-78"/>
+                <a:cs typeface="Amiri" pitchFamily="2" charset="-78"/>
+              </a:rPr>
               <a:t>WELCOME (1 min) — while students join.
 • Greet each student by name as they arrive: السَّلَامُ عَلَيْكُمْ. Take the register (Pastoral Tracker: attendance 0/1).
 • 2-MINUTE CHECK-IN (SEND training): a private chat to any student who seemed unsettled last lesson — “Are you okay today? 👍 / 👎”.
@@ -1936,7 +1944,11 @@
           <a:lstStyle/>
           <a:p>
             <a:r>
-              <a:rPr lang="en-US" dirty="0"/>
+              <a:rPr lang="ar-SA" dirty="0">
+                <a:latin typeface="Amiri" pitchFamily="2" charset="-78"/>
+                <a:ea typeface="Amiri" pitchFamily="2" charset="-78"/>
+                <a:cs typeface="Amiri" pitchFamily="2" charset="-78"/>
+              </a:rPr>
               <a:t>Question words: مَنْ شَارَكَ (who took part — PAST) · مَاذَا فَعَلْتَ (what did you do) · مَا رَأْيُكَ (your opinion) · خِطَطُكَ (your plans — FUTURE).</a:t>
             </a:r>
             <a:endParaRPr lang="en-US" dirty="0"/>
@@ -2508,6 +2520,7 @@
                   <a:srgbClr val="D4AF37"/>
                 </a:solidFill>
                 <a:latin typeface="Amiri" pitchFamily="2" charset="-78"/>
+                <a:ea typeface="Amiri" pitchFamily="2" charset="-78"/>
                 <a:cs typeface="Amiri" pitchFamily="2" charset="-78"/>
               </a:rPr>
               <a:t>م</a:t>
@@ -2714,6 +2727,7 @@
                   <a:srgbClr val="D4AF37"/>
                 </a:solidFill>
                 <a:latin typeface="Amiri" pitchFamily="2" charset="-78"/>
+                <a:ea typeface="Amiri" pitchFamily="2" charset="-78"/>
                 <a:cs typeface="Amiri" pitchFamily="2" charset="-78"/>
               </a:rPr>
               <a:t>وَرْشَةُ الكِتَابَةِ — وَرْشَةُ التَّوَاصُلِ المُتَكَامِلِ</a:t>
@@ -3171,6 +3185,7 @@
                   <a:srgbClr val="D4AF37"/>
                 </a:solidFill>
                 <a:latin typeface="Amiri" pitchFamily="2" charset="-78"/>
+                <a:ea typeface="Amiri" pitchFamily="2" charset="-78"/>
                 <a:cs typeface="Amiri" pitchFamily="2" charset="-78"/>
               </a:rPr>
               <a:t>م</a:t>
@@ -3491,6 +3506,7 @@
                   <a:srgbClr val="8A6D1E"/>
                 </a:solidFill>
                 <a:latin typeface="Amiri" pitchFamily="2" charset="-78"/>
+                <a:ea typeface="Amiri" pitchFamily="2" charset="-78"/>
                 <a:cs typeface="Amiri" pitchFamily="2" charset="-78"/>
               </a:rPr>
               <a:t>نَمُوذَجُ الإِجَابَةِ</a:t>
@@ -3604,6 +3620,7 @@
                   <a:srgbClr val="1F2A37"/>
                 </a:solidFill>
                 <a:latin typeface="Amiri" pitchFamily="2" charset="-78"/>
+                <a:ea typeface="Amiri" pitchFamily="2" charset="-78"/>
                 <a:cs typeface="Amiri" pitchFamily="2" charset="-78"/>
               </a:rPr>
               <a:t>مَرْحَبًا يَا أَيْمَنُ،</a:t>
@@ -3623,6 +3640,7 @@
                   <a:srgbClr val="1F2A37"/>
                 </a:solidFill>
                 <a:latin typeface="Amiri" pitchFamily="2" charset="-78"/>
+                <a:ea typeface="Amiri" pitchFamily="2" charset="-78"/>
                 <a:cs typeface="Amiri" pitchFamily="2" charset="-78"/>
               </a:rPr>
               <a:t>كَيْفَ حَالُكَ؟ أَمْسِ نَظَّمْنَا "الأُمْسِيَةَ الدُّوَلِيَّةَ" فِي مَدْرَسَتِي، وَكَانَتْ رَائِعَةً! أَوَّلًا، كَانَ هُنَاكَ أَجْنِحَةٌ لِخَمْسَةَ عَشَرَ بَلَدًا. أَنَا كُنْتُ فِي جَنَاحِ الجَزَائِرِ مَعَ أُخْتِي. قَدَّمْنَا الكُسْكُسَ وَالشَّايَ بِالنَّعْنَاعِ، وَشَرَحْنَا عَادَاتِ الضِّيَافَةِ عِنْدَنَا. بِالإِضَافَةِ إِلَى ذٰلِكَ، رَقَصَ الطُّلَّابُ رَقَصَاتٍ شَعْبِيَّةً عَلَى المَسْرَحِ. الأُمْسِيَةُ كَانَتْ مُتْعِبَةً، وَمَعَ ذٰلِكَ أَحْبَبْتُهَا كَثِيرًا، لِأَنِّي تَعَلَّمْتُ عَنْ ثَقَافَاتٍ جَدِيدَةٍ. لِذٰلِكَ سَأُشَارِكُ فِي السَّنَةِ القَادِمَةِ أَيْضًا. وَأَنْتَ، هَلْ عِنْدَكُمْ أُمْسِيَةٌ مِثْلُهَا فِي مَدْرَسَتِكَ؟</a:t>
@@ -3642,6 +3660,7 @@
                   <a:srgbClr val="1F2A37"/>
                 </a:solidFill>
                 <a:latin typeface="Amiri" pitchFamily="2" charset="-78"/>
+                <a:ea typeface="Amiri" pitchFamily="2" charset="-78"/>
                 <a:cs typeface="Amiri" pitchFamily="2" charset="-78"/>
               </a:rPr>
               <a:t>إِلَى اللِّقَاءِ،</a:t>
@@ -3661,6 +3680,7 @@
                   <a:srgbClr val="1F2A37"/>
                 </a:solidFill>
                 <a:latin typeface="Amiri" pitchFamily="2" charset="-78"/>
+                <a:ea typeface="Amiri" pitchFamily="2" charset="-78"/>
                 <a:cs typeface="Amiri" pitchFamily="2" charset="-78"/>
               </a:rPr>
               <a:t>يَاسِينُ</a:t>
@@ -3824,11 +3844,12 @@
               <a:buNone/>
             </a:pPr>
             <a:r>
-              <a:rPr lang="en-US" sz="950" b="1" dirty="0">
+              <a:rPr lang="ar-SA" sz="950" b="1" dirty="0">
                 <a:solidFill>
                   <a:srgbClr val="FFFFFF"/>
                 </a:solidFill>
                 <a:latin typeface="Calibri" pitchFamily="34" charset="0"/>
+                <a:ea typeface="Amiri" pitchFamily="2" charset="-78"/>
                 <a:cs typeface="Amiri" pitchFamily="2" charset="-78"/>
               </a:rPr>
               <a:t>أَوَّلًا</a:t>
@@ -3889,11 +3910,12 @@
               <a:buNone/>
             </a:pPr>
             <a:r>
-              <a:rPr lang="en-US" sz="950" b="1" dirty="0">
+              <a:rPr lang="ar-SA" sz="950" b="1" dirty="0">
                 <a:solidFill>
                   <a:srgbClr val="FFFFFF"/>
                 </a:solidFill>
                 <a:latin typeface="Calibri" pitchFamily="34" charset="0"/>
+                <a:ea typeface="Amiri" pitchFamily="2" charset="-78"/>
                 <a:cs typeface="Amiri" pitchFamily="2" charset="-78"/>
               </a:rPr>
               <a:t>بِالإِضَافَةِ إِلَى ذٰلِكَ</a:t>
@@ -3954,11 +3976,12 @@
               <a:buNone/>
             </a:pPr>
             <a:r>
-              <a:rPr lang="en-US" sz="950" b="1" dirty="0">
+              <a:rPr lang="ar-SA" sz="950" b="1" dirty="0">
                 <a:solidFill>
                   <a:srgbClr val="FFFFFF"/>
                 </a:solidFill>
                 <a:latin typeface="Calibri" pitchFamily="34" charset="0"/>
+                <a:ea typeface="Amiri" pitchFamily="2" charset="-78"/>
                 <a:cs typeface="Amiri" pitchFamily="2" charset="-78"/>
               </a:rPr>
               <a:t>وَمَعَ ذٰلِكَ</a:t>
@@ -4019,11 +4042,12 @@
               <a:buNone/>
             </a:pPr>
             <a:r>
-              <a:rPr lang="en-US" sz="950" b="1" dirty="0">
+              <a:rPr lang="ar-SA" sz="950" b="1" dirty="0">
                 <a:solidFill>
                   <a:srgbClr val="FFFFFF"/>
                 </a:solidFill>
                 <a:latin typeface="Calibri" pitchFamily="34" charset="0"/>
+                <a:ea typeface="Amiri" pitchFamily="2" charset="-78"/>
                 <a:cs typeface="Amiri" pitchFamily="2" charset="-78"/>
               </a:rPr>
               <a:t>لِذٰلِكَ سَأُشَارِكُ</a:t>
@@ -4157,6 +4181,7 @@
                   <a:srgbClr val="D4AF37"/>
                 </a:solidFill>
                 <a:latin typeface="Amiri" pitchFamily="2" charset="-78"/>
+                <a:ea typeface="Amiri" pitchFamily="2" charset="-78"/>
                 <a:cs typeface="Amiri" pitchFamily="2" charset="-78"/>
               </a:rPr>
               <a:t>م</a:t>
@@ -4477,6 +4502,7 @@
                   <a:srgbClr val="8A6D1E"/>
                 </a:solidFill>
                 <a:latin typeface="Amiri" pitchFamily="2" charset="-78"/>
+                <a:ea typeface="Amiri" pitchFamily="2" charset="-78"/>
                 <a:cs typeface="Amiri" pitchFamily="2" charset="-78"/>
               </a:rPr>
               <a:t>نَمُوذَجُ الإِجَابَةِ</a:t>
@@ -4590,6 +4616,7 @@
                   <a:srgbClr val="1F2A37"/>
                 </a:solidFill>
                 <a:latin typeface="Amiri" pitchFamily="2" charset="-78"/>
+                <a:ea typeface="Amiri" pitchFamily="2" charset="-78"/>
                 <a:cs typeface="Amiri" pitchFamily="2" charset="-78"/>
               </a:rPr>
               <a:t>عَزِيزِي أَيْمَنُ،</a:t>
@@ -4609,6 +4636,7 @@
                   <a:srgbClr val="1F2A37"/>
                 </a:solidFill>
                 <a:latin typeface="Amiri" pitchFamily="2" charset="-78"/>
+                <a:ea typeface="Amiri" pitchFamily="2" charset="-78"/>
                 <a:cs typeface="Amiri" pitchFamily="2" charset="-78"/>
               </a:rPr>
               <a:t>مَا زِلْتُ أَشُمُّ رَائِحَةَ الكُسْكُسِ فِي مَلَابِسِي بَعْدَ "الأُمْسِيَةِ الدُّوَلِيَّةِ" الَّتِي نَظَّمْنَاهَا أَمْسِ، وَشَارَكَ فِيهَا طُلَّابٌ مِنْ خَمْسَةَ عَشَرَ بَلَدًا. كُنْتُ مَسْؤُولًا عَنْ جَنَاحِ الجَزَائِرِ، فَقَدَّمْتُ لِلزُّوَّارِ الشَّايَ بِالنَّعْنَاعِ كَمَا تُقَدِّمُهُ جَدَّتِي، وَشَرَحْتُ لَهُمْ لِمَاذَا لَا يَخْرُجُ الضَّيْفُ عِنْدَنَا قَبْلَ أَنْ يَأْكُلَ. وَأَكْثَرُ مَا أَدْهَشَنِي أَنَّ الجَنَاحَ اليَابَانِيَّ كَانَ يُشْبِهُ جَنَاحَنَا فِي احْتِرَامِ الكِبَارِ، مَعَ أَنَّ الثَّقَافَتَيْنِ بَعِيدَتَانِ جِدًّا. صَحِيحٌ أَنَّنِي وَقَفْتُ خَمْسَ سَاعَاتٍ، غَيْرَ أَنَّ ابْتِسَامَاتِ الزُّوَّارِ أَنْسَتْنِي التَّعَبَ. لِذٰلِكَ اقْتَرَحْتُ عَلَى المُدِيرِ أَنْ نَدْعُوَ مَدْرَسَتَكُمْ فِي العَامِ القَادِمِ. هَلْ تَقْبَلُ؟</a:t>
@@ -4628,6 +4656,7 @@
                   <a:srgbClr val="1F2A37"/>
                 </a:solidFill>
                 <a:latin typeface="Amiri" pitchFamily="2" charset="-78"/>
+                <a:ea typeface="Amiri" pitchFamily="2" charset="-78"/>
                 <a:cs typeface="Amiri" pitchFamily="2" charset="-78"/>
               </a:rPr>
               <a:t>مَعَ تَحِيَّاتِي،</a:t>
@@ -4647,6 +4676,7 @@
                   <a:srgbClr val="1F2A37"/>
                 </a:solidFill>
                 <a:latin typeface="Amiri" pitchFamily="2" charset="-78"/>
+                <a:ea typeface="Amiri" pitchFamily="2" charset="-78"/>
                 <a:cs typeface="Amiri" pitchFamily="2" charset="-78"/>
               </a:rPr>
               <a:t>يَاسِينُ</a:t>
@@ -4810,11 +4840,12 @@
               <a:buNone/>
             </a:pPr>
             <a:r>
-              <a:rPr lang="en-US" sz="950" b="1" dirty="0">
+              <a:rPr lang="ar-SA" sz="950" b="1" dirty="0">
                 <a:solidFill>
                   <a:srgbClr val="FFFFFF"/>
                 </a:solidFill>
                 <a:latin typeface="Calibri" pitchFamily="34" charset="0"/>
+                <a:ea typeface="Amiri" pitchFamily="2" charset="-78"/>
                 <a:cs typeface="Amiri" pitchFamily="2" charset="-78"/>
               </a:rPr>
               <a:t>مَا زِلْتُ أَشُمُّ</a:t>
@@ -4875,11 +4906,12 @@
               <a:buNone/>
             </a:pPr>
             <a:r>
-              <a:rPr lang="en-US" sz="950" b="1" dirty="0">
+              <a:rPr lang="ar-SA" sz="950" b="1" dirty="0">
                 <a:solidFill>
                   <a:srgbClr val="FFFFFF"/>
                 </a:solidFill>
                 <a:latin typeface="Calibri" pitchFamily="34" charset="0"/>
+                <a:ea typeface="Amiri" pitchFamily="2" charset="-78"/>
                 <a:cs typeface="Amiri" pitchFamily="2" charset="-78"/>
               </a:rPr>
               <a:t>كَمَا تُقَدِّمُهُ جَدَّتِي</a:t>
@@ -4940,11 +4972,12 @@
               <a:buNone/>
             </a:pPr>
             <a:r>
-              <a:rPr lang="en-US" sz="950" b="1" dirty="0">
+              <a:rPr lang="ar-SA" sz="950" b="1" dirty="0">
                 <a:solidFill>
                   <a:srgbClr val="FFFFFF"/>
                 </a:solidFill>
                 <a:latin typeface="Calibri" pitchFamily="34" charset="0"/>
+                <a:ea typeface="Amiri" pitchFamily="2" charset="-78"/>
                 <a:cs typeface="Amiri" pitchFamily="2" charset="-78"/>
               </a:rPr>
               <a:t>مَعَ أَنَّ … بَعِيدَتَانِ</a:t>
@@ -5005,11 +5038,12 @@
               <a:buNone/>
             </a:pPr>
             <a:r>
-              <a:rPr lang="en-US" sz="950" b="1" dirty="0">
+              <a:rPr lang="ar-SA" sz="950" b="1" dirty="0">
                 <a:solidFill>
                   <a:srgbClr val="FFFFFF"/>
                 </a:solidFill>
                 <a:latin typeface="Calibri" pitchFamily="34" charset="0"/>
+                <a:ea typeface="Amiri" pitchFamily="2" charset="-78"/>
                 <a:cs typeface="Amiri" pitchFamily="2" charset="-78"/>
               </a:rPr>
               <a:t>أَنْسَتْنِي التَّعَبَ</a:t>
@@ -5143,6 +5177,7 @@
                   <a:srgbClr val="D4AF37"/>
                 </a:solidFill>
                 <a:latin typeface="Amiri" pitchFamily="2" charset="-78"/>
+                <a:ea typeface="Amiri" pitchFamily="2" charset="-78"/>
                 <a:cs typeface="Amiri" pitchFamily="2" charset="-78"/>
               </a:rPr>
               <a:t>م</a:t>
@@ -5463,6 +5498,7 @@
                   <a:srgbClr val="8A6D1E"/>
                 </a:solidFill>
                 <a:latin typeface="Amiri" pitchFamily="2" charset="-78"/>
+                <a:ea typeface="Amiri" pitchFamily="2" charset="-78"/>
                 <a:cs typeface="Amiri" pitchFamily="2" charset="-78"/>
               </a:rPr>
               <a:t>اخْتَرْ عُنْوَانًا وَاحِدًا</a:t>
@@ -5743,6 +5779,7 @@
                   <a:srgbClr val="1B3B6F"/>
                 </a:solidFill>
                 <a:latin typeface="Amiri" pitchFamily="2" charset="-78"/>
+                <a:ea typeface="Amiri" pitchFamily="2" charset="-78"/>
                 <a:cs typeface="Amiri" pitchFamily="2" charset="-78"/>
               </a:rPr>
               <a:t>أَنَا وَالعَالَمُ: رِحْلَتِي الثَّقَافِيَّةُ</a:t>
@@ -5781,6 +5818,7 @@
                   <a:srgbClr val="1B3B6F"/>
                 </a:solidFill>
                 <a:latin typeface="Amiri" pitchFamily="2" charset="-78"/>
+                <a:ea typeface="Amiri" pitchFamily="2" charset="-78"/>
                 <a:cs typeface="Amiri" pitchFamily="2" charset="-78"/>
               </a:rPr>
               <a:t>(أ)</a:t>
@@ -5887,6 +5925,7 @@
                   <a:srgbClr val="1B3B6F"/>
                 </a:solidFill>
                 <a:latin typeface="Amiri" pitchFamily="2" charset="-78"/>
+                <a:ea typeface="Amiri" pitchFamily="2" charset="-78"/>
                 <a:cs typeface="Amiri" pitchFamily="2" charset="-78"/>
               </a:rPr>
               <a:t>أَصْلُكَ وَلُغَاتُكَ فِي المَاضِي وَالآنَ · عَادَاتُكَ وَأَعْيَادُكَ · تَجْرِبَةُ سَفَرٍ أَوْ تَبَادُلٍ · مَا تَعَلَّمْتَهُ وَطُمُوحَاتُكَ</a:t>
@@ -6018,6 +6057,7 @@
                   <a:srgbClr val="1B3B6F"/>
                 </a:solidFill>
                 <a:latin typeface="Amiri" pitchFamily="2" charset="-78"/>
+                <a:ea typeface="Amiri" pitchFamily="2" charset="-78"/>
                 <a:cs typeface="Amiri" pitchFamily="2" charset="-78"/>
               </a:rPr>
               <a:t>هَلْ يُمْكِنُ أَنْ نَكُونَ مُوَاطِنِينَ عَالَمِيِّينَ وَنَحْتَفِظَ بِهُوِيَّتِنَا؟</a:t>
@@ -6056,6 +6096,7 @@
                   <a:srgbClr val="1B3B6F"/>
                 </a:solidFill>
                 <a:latin typeface="Amiri" pitchFamily="2" charset="-78"/>
+                <a:ea typeface="Amiri" pitchFamily="2" charset="-78"/>
                 <a:cs typeface="Amiri" pitchFamily="2" charset="-78"/>
               </a:rPr>
               <a:t>(ب)</a:t>
@@ -6159,6 +6200,7 @@
                   <a:srgbClr val="1B3B6F"/>
                 </a:solidFill>
                 <a:latin typeface="Amiri" pitchFamily="2" charset="-78"/>
+                <a:ea typeface="Amiri" pitchFamily="2" charset="-78"/>
                 <a:cs typeface="Amiri" pitchFamily="2" charset="-78"/>
               </a:rPr>
               <a:t>المَوْضُوعُ · تَأْثِيرُ العَوْلَمَةِ عَلَى الهُوِيَّةِ · مِثَالٌ مِنْ تَجْرِبَتِكَ · رَأْيُكَ</a:t>
@@ -6358,6 +6400,7 @@
                   <a:srgbClr val="D4AF37"/>
                 </a:solidFill>
                 <a:latin typeface="Amiri" pitchFamily="2" charset="-78"/>
+                <a:ea typeface="Amiri" pitchFamily="2" charset="-78"/>
                 <a:cs typeface="Amiri" pitchFamily="2" charset="-78"/>
               </a:rPr>
               <a:t>م</a:t>
@@ -6678,6 +6721,7 @@
                   <a:srgbClr val="8A6D1E"/>
                 </a:solidFill>
                 <a:latin typeface="Amiri" pitchFamily="2" charset="-78"/>
+                <a:ea typeface="Amiri" pitchFamily="2" charset="-78"/>
                 <a:cs typeface="Amiri" pitchFamily="2" charset="-78"/>
               </a:rPr>
               <a:t>خُطَّةُ الكِتَابَةِ</a:t>
@@ -7302,6 +7346,7 @@
                   <a:srgbClr val="1B3B6F"/>
                 </a:solidFill>
                 <a:latin typeface="Amiri" pitchFamily="2" charset="-78"/>
+                <a:ea typeface="Amiri" pitchFamily="2" charset="-78"/>
                 <a:cs typeface="Amiri" pitchFamily="2" charset="-78"/>
               </a:rPr>
               <a:t>كُنْتُ أَتَكَلَّمُ العَرَبِيَّةَ فَقَطْ.</a:t>
@@ -7401,6 +7446,7 @@
                   <a:srgbClr val="1B3B6F"/>
                 </a:solidFill>
                 <a:latin typeface="Amiri" pitchFamily="2" charset="-78"/>
+                <a:ea typeface="Amiri" pitchFamily="2" charset="-78"/>
                 <a:cs typeface="Amiri" pitchFamily="2" charset="-78"/>
               </a:rPr>
               <a:t>نُقَدِّمُ الشَّايَ بِالنَّعْنَاعِ لِكُلِّ ضَيْفٍ.</a:t>
@@ -7500,6 +7546,7 @@
                   <a:srgbClr val="1B3B6F"/>
                 </a:solidFill>
                 <a:latin typeface="Amiri" pitchFamily="2" charset="-78"/>
+                <a:ea typeface="Amiri" pitchFamily="2" charset="-78"/>
                 <a:cs typeface="Amiri" pitchFamily="2" charset="-78"/>
               </a:rPr>
               <a:t>إِذَا نَجَحْتُ، فَسَأُسَاعِدُ النَّاسَ.</a:t>
@@ -7661,6 +7708,7 @@
                   <a:srgbClr val="1F2A37"/>
                 </a:solidFill>
                 <a:latin typeface="Amiri" pitchFamily="2" charset="-78"/>
+                <a:ea typeface="Amiri" pitchFamily="2" charset="-78"/>
                 <a:cs typeface="Amiri" pitchFamily="2" charset="-78"/>
               </a:rPr>
               <a:t>أ</a:t>
@@ -7687,6 +7735,7 @@
                   <a:srgbClr val="1F2A37"/>
                 </a:solidFill>
                 <a:latin typeface="Amiri" pitchFamily="2" charset="-78"/>
+                <a:ea typeface="Amiri" pitchFamily="2" charset="-78"/>
                 <a:cs typeface="Amiri" pitchFamily="2" charset="-78"/>
               </a:rPr>
               <a:t>ب</a:t>
@@ -7833,6 +7882,7 @@
                   <a:srgbClr val="D4AF37"/>
                 </a:solidFill>
                 <a:latin typeface="Amiri" pitchFamily="2" charset="-78"/>
+                <a:ea typeface="Amiri" pitchFamily="2" charset="-78"/>
                 <a:cs typeface="Amiri" pitchFamily="2" charset="-78"/>
               </a:rPr>
               <a:t>م</a:t>
@@ -8090,6 +8140,7 @@
                   <a:srgbClr val="8A6D1E"/>
                 </a:solidFill>
                 <a:latin typeface="Amiri" pitchFamily="2" charset="-78"/>
+                <a:ea typeface="Amiri" pitchFamily="2" charset="-78"/>
                 <a:cs typeface="Amiri" pitchFamily="2" charset="-78"/>
               </a:rPr>
               <a:t>أ</a:t>
@@ -8154,6 +8205,7 @@
                   <a:srgbClr val="1B3B6F"/>
                 </a:solidFill>
                 <a:latin typeface="Amiri" pitchFamily="2" charset="-78"/>
+                <a:ea typeface="Amiri" pitchFamily="2" charset="-78"/>
                 <a:cs typeface="Amiri" pitchFamily="2" charset="-78"/>
               </a:rPr>
               <a:t>أ</a:t>
@@ -8205,6 +8257,7 @@
                   <a:srgbClr val="8A6D1E"/>
                 </a:solidFill>
                 <a:latin typeface="Amiri" pitchFamily="2" charset="-78"/>
+                <a:ea typeface="Amiri" pitchFamily="2" charset="-78"/>
                 <a:cs typeface="Amiri" pitchFamily="2" charset="-78"/>
               </a:rPr>
               <a:t>نَمُوذَجُ الإِجَابَةِ</a:t>
@@ -8318,6 +8371,7 @@
                   <a:srgbClr val="1F2A37"/>
                 </a:solidFill>
                 <a:latin typeface="Amiri" pitchFamily="2" charset="-78"/>
+                <a:ea typeface="Amiri" pitchFamily="2" charset="-78"/>
                 <a:cs typeface="Amiri" pitchFamily="2" charset="-78"/>
               </a:rPr>
               <a:t>أَوَّلًا، اسْمِي يَاسِينُ، وَوُلِدْتُ فِي مَدِينَةِ قَسَنْطِينَةَ فِي الجَزَائِرِ. عِنْدَمَا كُنْتُ فِي العَاشِرَةِ، انْتَقَلَتْ أُسْرَتِي إِلَى بِرْمِنْغْهَامَ. فِي البِدَايَةِ كُنْتُ أَتَكَلَّمُ العَرَبِيَّةَ وَالفَرَنْسِيَّةَ فَقَطْ، أَمَّا الآنَ فَأَتَكَلَّمُ الإِنْجْلِيزِيَّةَ بِطَلَاقَةٍ.</a:t>
@@ -8337,6 +8391,7 @@
                   <a:srgbClr val="1F2A37"/>
                 </a:solidFill>
                 <a:latin typeface="Amiri" pitchFamily="2" charset="-78"/>
+                <a:ea typeface="Amiri" pitchFamily="2" charset="-78"/>
                 <a:cs typeface="Amiri" pitchFamily="2" charset="-78"/>
               </a:rPr>
               <a:t>فِي البَيْتِ نُحَافِظُ عَلَى عَادَاتِنَا. مَثَلًا، نُقَدِّمُ الشَّايَ بِالنَّعْنَاعِ لِكُلِّ ضَيْفٍ، وَنَأْكُلُ الكُسْكُسَ يَوْمَ الجُمُعَةِ. فِي العِيدِ نُصَلِّي فِي الحَدِيقَةِ، ثُمَّ نَزُورُ أَصْدِقَاءَنَا الجَزَائِرِيِّينَ وَجِيرَانَنَا الإِنْجْلِيزَ أَيْضًا.</a:t>
@@ -8356,6 +8411,7 @@
                   <a:srgbClr val="1F2A37"/>
                 </a:solidFill>
                 <a:latin typeface="Amiri" pitchFamily="2" charset="-78"/>
+                <a:ea typeface="Amiri" pitchFamily="2" charset="-78"/>
                 <a:cs typeface="Amiri" pitchFamily="2" charset="-78"/>
               </a:rPr>
               <a:t>بِالإِضَافَةِ إِلَى ذٰلِكَ، أُحِبُّ السَّفَرَ كَثِيرًا. فِي الصَّيْفِ المَاضِي شَارَكْتُ فِي تَبَادُلٍ ثَقَافِيٍّ فِي المَغْرِبِ، وَأَقَمْتُ عِنْدَ عَائِلَةٍ لَطِيفَةٍ ثَلَاثَةَ أَسَابِيعَ. كَانَتِ اللَّهْجَةُ صَعْبَةً، وَمَعَ ذٰلِكَ فَهِمْتُ النَّاسَ جَيِّدًا، وَصَارُوا أَصْدِقَائِي.</a:t>
@@ -8375,6 +8431,7 @@
                   <a:srgbClr val="1F2A37"/>
                 </a:solidFill>
                 <a:latin typeface="Amiri" pitchFamily="2" charset="-78"/>
+                <a:ea typeface="Amiri" pitchFamily="2" charset="-78"/>
                 <a:cs typeface="Amiri" pitchFamily="2" charset="-78"/>
               </a:rPr>
               <a:t>تَعَلَّمْتُ أَنَّ الثَّقَافَاتِ مُخْتَلِفَةٌ، لٰكِنْ لَيْسَتْ إِحْدَاهَا أَفْضَلَ مِنَ الأُخْرَى. لِذٰلِكَ أَطْمَحُ إِلَى أَنْ أَعْمَلَ فِي مُنَظَّمَةٍ دُوَلِيَّةٍ. إِذَا نَجَحْتُ فِي ذٰلِكَ، فَسَأُسَاعِدُ النَّاسَ عَلَى التَّفَاهُمِ وَالاحْتِرَامِ.</a:t>
@@ -8538,11 +8595,12 @@
               <a:buNone/>
             </a:pPr>
             <a:r>
-              <a:rPr lang="en-US" sz="950" b="1" dirty="0">
+              <a:rPr lang="ar-SA" sz="950" b="1" dirty="0">
                 <a:solidFill>
                   <a:srgbClr val="FFFFFF"/>
                 </a:solidFill>
                 <a:latin typeface="Calibri" pitchFamily="34" charset="0"/>
+                <a:ea typeface="Amiri" pitchFamily="2" charset="-78"/>
                 <a:cs typeface="Amiri" pitchFamily="2" charset="-78"/>
               </a:rPr>
               <a:t>أَوَّلًا</a:t>
@@ -8603,11 +8661,12 @@
               <a:buNone/>
             </a:pPr>
             <a:r>
-              <a:rPr lang="en-US" sz="950" b="1" dirty="0">
+              <a:rPr lang="ar-SA" sz="950" b="1" dirty="0">
                 <a:solidFill>
                   <a:srgbClr val="FFFFFF"/>
                 </a:solidFill>
                 <a:latin typeface="Calibri" pitchFamily="34" charset="0"/>
+                <a:ea typeface="Amiri" pitchFamily="2" charset="-78"/>
                 <a:cs typeface="Amiri" pitchFamily="2" charset="-78"/>
               </a:rPr>
               <a:t>بِالإِضَافَةِ إِلَى ذٰلِكَ</a:t>
@@ -8668,11 +8727,12 @@
               <a:buNone/>
             </a:pPr>
             <a:r>
-              <a:rPr lang="en-US" sz="950" b="1" dirty="0">
+              <a:rPr lang="ar-SA" sz="950" b="1" dirty="0">
                 <a:solidFill>
                   <a:srgbClr val="FFFFFF"/>
                 </a:solidFill>
                 <a:latin typeface="Calibri" pitchFamily="34" charset="0"/>
+                <a:ea typeface="Amiri" pitchFamily="2" charset="-78"/>
                 <a:cs typeface="Amiri" pitchFamily="2" charset="-78"/>
               </a:rPr>
               <a:t>وَمَعَ ذٰلِكَ</a:t>
@@ -8733,11 +8793,12 @@
               <a:buNone/>
             </a:pPr>
             <a:r>
-              <a:rPr lang="en-US" sz="950" b="1" dirty="0">
+              <a:rPr lang="ar-SA" sz="950" b="1" dirty="0">
                 <a:solidFill>
                   <a:srgbClr val="FFFFFF"/>
                 </a:solidFill>
                 <a:latin typeface="Calibri" pitchFamily="34" charset="0"/>
+                <a:ea typeface="Amiri" pitchFamily="2" charset="-78"/>
                 <a:cs typeface="Amiri" pitchFamily="2" charset="-78"/>
               </a:rPr>
               <a:t>لِذٰلِكَ أَطْمَحُ</a:t>
@@ -8871,6 +8932,7 @@
                   <a:srgbClr val="D4AF37"/>
                 </a:solidFill>
                 <a:latin typeface="Amiri" pitchFamily="2" charset="-78"/>
+                <a:ea typeface="Amiri" pitchFamily="2" charset="-78"/>
                 <a:cs typeface="Amiri" pitchFamily="2" charset="-78"/>
               </a:rPr>
               <a:t>م</a:t>
@@ -9128,6 +9190,7 @@
                   <a:srgbClr val="8A6D1E"/>
                 </a:solidFill>
                 <a:latin typeface="Amiri" pitchFamily="2" charset="-78"/>
+                <a:ea typeface="Amiri" pitchFamily="2" charset="-78"/>
                 <a:cs typeface="Amiri" pitchFamily="2" charset="-78"/>
               </a:rPr>
               <a:t>أ</a:t>
@@ -9192,6 +9255,7 @@
                   <a:srgbClr val="1B3B6F"/>
                 </a:solidFill>
                 <a:latin typeface="Amiri" pitchFamily="2" charset="-78"/>
+                <a:ea typeface="Amiri" pitchFamily="2" charset="-78"/>
                 <a:cs typeface="Amiri" pitchFamily="2" charset="-78"/>
               </a:rPr>
               <a:t>أ</a:t>
@@ -9243,6 +9307,7 @@
                   <a:srgbClr val="8A6D1E"/>
                 </a:solidFill>
                 <a:latin typeface="Amiri" pitchFamily="2" charset="-78"/>
+                <a:ea typeface="Amiri" pitchFamily="2" charset="-78"/>
                 <a:cs typeface="Amiri" pitchFamily="2" charset="-78"/>
               </a:rPr>
               <a:t>نَمُوذَجُ الإِجَابَةِ</a:t>
@@ -9356,6 +9421,7 @@
                   <a:srgbClr val="1F2A37"/>
                 </a:solidFill>
                 <a:latin typeface="Amiri" pitchFamily="2" charset="-78"/>
+                <a:ea typeface="Amiri" pitchFamily="2" charset="-78"/>
                 <a:cs typeface="Amiri" pitchFamily="2" charset="-78"/>
               </a:rPr>
               <a:t>حِينَ وَصَلْتُ إِلَى بِرْمِنْغْهَامَ وَأَنَا فِي العَاشِرَةِ، كُنْتُ أَحْمِلُ حَقِيبَةً صَغِيرَةً زَرْقَاءَ وَثَلَاثَ كَلِمَاتٍ إِنْجْلِيزِيَّةٍ فَقَطْ. أَمَّا اليَوْمَ، فَأَحْمِلُ ثَلَاثَ لُغَاتٍ وَثَقَافَتَيْنِ، وَأَسْئِلَةً كَثِيرَةً عَنْ مَعْنَى الانْتِمَاءِ وَالوَطَنِ.</a:t>
@@ -9375,6 +9441,7 @@
                   <a:srgbClr val="1F2A37"/>
                 </a:solidFill>
                 <a:latin typeface="Amiri" pitchFamily="2" charset="-78"/>
+                <a:ea typeface="Amiri" pitchFamily="2" charset="-78"/>
                 <a:cs typeface="Amiri" pitchFamily="2" charset="-78"/>
               </a:rPr>
               <a:t>فَفِي بَيْتِنَا مَا زَالَتِ الجَزَائِرُ حَاضِرَةً: الشَّايُ بِالنَّعْنَاعِ الَّذِي يُقَدَّمُ لِكُلِّ زَائِرٍ، وَالكُسْكُسُ الَّذِي يَجْمَعُنَا كُلَّ جُمُعَةٍ، وَصَلَاةُ العِيدِ الَّتِي نُؤَدِّيهَا فِي حَدِيقَةِ المَدِينَةِ مَعَ آلَافِ المُسْلِمِينَ مِنْ عَشَرَاتِ البُلْدَانِ، يَتَبَادَلُونَ التَّهَانِيَ بِلُغَاتٍ مُخْتَلِفَةٍ.</a:t>
@@ -9394,6 +9461,7 @@
                   <a:srgbClr val="1F2A37"/>
                 </a:solidFill>
                 <a:latin typeface="Amiri" pitchFamily="2" charset="-78"/>
+                <a:ea typeface="Amiri" pitchFamily="2" charset="-78"/>
                 <a:cs typeface="Amiri" pitchFamily="2" charset="-78"/>
               </a:rPr>
               <a:t>غَيْرَ أَنَّ الرِّحْلَةَ لَمْ تَكُنْ سَهْلَةً؛ فَقَدْ كُنْتُ أَخْجَلُ مِنْ لَهْجَتِي، وَأُخْفِي طَعَامِي عَنْ زُمَلَائِي خَوْفًا مِنْ أَسْئِلَتِهِمْ. وَحِينَ شَارَكْتُ فِي تَبَادُلٍ ثَقَافِيٍّ فِي المَغْرِبِ، أَدْرَكْتُ أَنَّ الاخْتِلَافَ لَيْسَ عَيْبًا، بَلْ نَافِذَةٌ نَرَى مِنْهَا العَالَمَ بِعُيُونٍ جَدِيدَةٍ، وَيَرَانَا مِنْهَا الآخَرُونَ أَيْضًا.</a:t>
@@ -9413,6 +9481,7 @@
                   <a:srgbClr val="1F2A37"/>
                 </a:solidFill>
                 <a:latin typeface="Amiri" pitchFamily="2" charset="-78"/>
+                <a:ea typeface="Amiri" pitchFamily="2" charset="-78"/>
                 <a:cs typeface="Amiri" pitchFamily="2" charset="-78"/>
               </a:rPr>
               <a:t>لِذٰلِكَ أَطْمَحُ إِلَى أَنْ أَعْمَلَ فِي مُنَظَّمَةٍ دُوَلِيَّةٍ، لِأَبْنِيَ جُسُورًا بَيْنَ الشُّعُوبِ وَالثَّقَافَاتِ. وَلَوْ رَآنِي ذٰلِكَ الطِّفْلُ الخَائِفُ فِي المَطَارِ اليَوْمَ، لَقُلْتُ لَهُ: "لَا تَخَفْ؛ فَحَقِيبَتُكَ الصَّغِيرَةُ سَتَتَّسِعُ لِلْعَالَمِ كُلِّهِ".</a:t>
@@ -9511,11 +9580,12 @@
               <a:buNone/>
             </a:pPr>
             <a:r>
-              <a:rPr lang="en-US" sz="950" b="1" dirty="0">
+              <a:rPr lang="ar-SA" sz="950" b="1" dirty="0">
                 <a:solidFill>
                   <a:srgbClr val="FFFFFF"/>
                 </a:solidFill>
                 <a:latin typeface="Calibri" pitchFamily="34" charset="0"/>
+                <a:ea typeface="Amiri" pitchFamily="2" charset="-78"/>
                 <a:cs typeface="Amiri" pitchFamily="2" charset="-78"/>
               </a:rPr>
               <a:t>وَأَنَا فِي العَاشِرَةِ</a:t>
@@ -9576,11 +9646,12 @@
               <a:buNone/>
             </a:pPr>
             <a:r>
-              <a:rPr lang="en-US" sz="950" b="1" dirty="0">
+              <a:rPr lang="ar-SA" sz="950" b="1" dirty="0">
                 <a:solidFill>
                   <a:srgbClr val="FFFFFF"/>
                 </a:solidFill>
                 <a:latin typeface="Calibri" pitchFamily="34" charset="0"/>
+                <a:ea typeface="Amiri" pitchFamily="2" charset="-78"/>
                 <a:cs typeface="Amiri" pitchFamily="2" charset="-78"/>
               </a:rPr>
               <a:t>الَّذِي يُقَدَّمُ</a:t>
@@ -9641,11 +9712,12 @@
               <a:buNone/>
             </a:pPr>
             <a:r>
-              <a:rPr lang="en-US" sz="950" b="1" dirty="0">
+              <a:rPr lang="ar-SA" sz="950" b="1" dirty="0">
                 <a:solidFill>
                   <a:srgbClr val="FFFFFF"/>
                 </a:solidFill>
                 <a:latin typeface="Calibri" pitchFamily="34" charset="0"/>
+                <a:ea typeface="Amiri" pitchFamily="2" charset="-78"/>
                 <a:cs typeface="Amiri" pitchFamily="2" charset="-78"/>
               </a:rPr>
               <a:t>لَيْسَ عَيْبًا، بَلْ نَافِذَةٌ</a:t>
@@ -9706,11 +9778,12 @@
               <a:buNone/>
             </a:pPr>
             <a:r>
-              <a:rPr lang="en-US" sz="950" b="1" dirty="0">
+              <a:rPr lang="ar-SA" sz="950" b="1" dirty="0">
                 <a:solidFill>
                   <a:srgbClr val="FFFFFF"/>
                 </a:solidFill>
                 <a:latin typeface="Calibri" pitchFamily="34" charset="0"/>
+                <a:ea typeface="Amiri" pitchFamily="2" charset="-78"/>
                 <a:cs typeface="Amiri" pitchFamily="2" charset="-78"/>
               </a:rPr>
               <a:t>لَوْ رَآنِي … لَقُلْتُ</a:t>
@@ -9844,6 +9917,7 @@
                   <a:srgbClr val="D4AF37"/>
                 </a:solidFill>
                 <a:latin typeface="Amiri" pitchFamily="2" charset="-78"/>
+                <a:ea typeface="Amiri" pitchFamily="2" charset="-78"/>
                 <a:cs typeface="Amiri" pitchFamily="2" charset="-78"/>
               </a:rPr>
               <a:t>م</a:t>
@@ -10101,6 +10175,7 @@
                   <a:srgbClr val="8A6D1E"/>
                 </a:solidFill>
                 <a:latin typeface="Amiri" pitchFamily="2" charset="-78"/>
+                <a:ea typeface="Amiri" pitchFamily="2" charset="-78"/>
                 <a:cs typeface="Amiri" pitchFamily="2" charset="-78"/>
               </a:rPr>
               <a:t>ب</a:t>
@@ -10165,6 +10240,7 @@
                   <a:srgbClr val="1B3B6F"/>
                 </a:solidFill>
                 <a:latin typeface="Amiri" pitchFamily="2" charset="-78"/>
+                <a:ea typeface="Amiri" pitchFamily="2" charset="-78"/>
                 <a:cs typeface="Amiri" pitchFamily="2" charset="-78"/>
               </a:rPr>
               <a:t>ب</a:t>
@@ -10216,6 +10292,7 @@
                   <a:srgbClr val="8A6D1E"/>
                 </a:solidFill>
                 <a:latin typeface="Amiri" pitchFamily="2" charset="-78"/>
+                <a:ea typeface="Amiri" pitchFamily="2" charset="-78"/>
                 <a:cs typeface="Amiri" pitchFamily="2" charset="-78"/>
               </a:rPr>
               <a:t>نَمُوذَجُ الإِجَابَةِ</a:t>
@@ -10329,6 +10406,7 @@
                   <a:srgbClr val="1F2A37"/>
                 </a:solidFill>
                 <a:latin typeface="Amiri" pitchFamily="2" charset="-78"/>
+                <a:ea typeface="Amiri" pitchFamily="2" charset="-78"/>
                 <a:cs typeface="Amiri" pitchFamily="2" charset="-78"/>
               </a:rPr>
               <a:t>يَعِيشُ كَثِيرٌ مِنَ الشَّبَابِ فِي المُدُنِ الكَبِيرَةِ اليَوْمَ بَيْنَ عَالَمَيْنِ: عَالَمِ الأُسْرَةِ بِلُغَتِهَا وَأَعْيَادِهَا وَعَادَاتِهَا، وَعَالَمٍ مُتَّصِلٍ لَا يَعْرِفُ الحُدُودَ وَلَا يَنَامُ. فَهَلْ يُمْكِنُ أَنْ نَكُونَ مُوَاطِنِينَ عَالَمِيِّينَ وَنَحْتَفِظَ بِهُوِيَّتِنَا فِي الوَقْتِ نَفْسِهِ؟</a:t>
@@ -10348,6 +10426,7 @@
                   <a:srgbClr val="1F2A37"/>
                 </a:solidFill>
                 <a:latin typeface="Amiri" pitchFamily="2" charset="-78"/>
+                <a:ea typeface="Amiri" pitchFamily="2" charset="-78"/>
                 <a:cs typeface="Amiri" pitchFamily="2" charset="-78"/>
               </a:rPr>
               <a:t>مِنْ نَاحِيَةٍ، تَدْفَعُنَا العَوْلَمَةُ نَحْوَ التَّشَابُهِ؛ فَنَلْبَسُ المَلَابِسَ نَفْسَهَا، وَنَسْمَعُ الأَغَانِيَ نَفْسَهَا، وَنُشَاهِدُ المُسَلْسَلَاتِ نَفْسَهَا، مِمَّا قَدْ يُضْعِفُ لُغَاتِنَا وَتَقَالِيدَنَا. وَمِنْ نَاحِيَةٍ أُخْرَى، تُتِيحُ لَنَا الوَسَائِلُ نَفْسُهَا أَنْ نُعَرِّفَ العَالَمَ بِثَقَافَتِنَا، وَأَنْ نَتَعَلَّمَ مِنْ ثَقَافَاتٍ أُخْرَى دُونَ أَنْ نُغَادِرَ بُيُوتَنَا.</a:t>
@@ -10367,6 +10446,7 @@
                   <a:srgbClr val="1F2A37"/>
                 </a:solidFill>
                 <a:latin typeface="Amiri" pitchFamily="2" charset="-78"/>
+                <a:ea typeface="Amiri" pitchFamily="2" charset="-78"/>
                 <a:cs typeface="Amiri" pitchFamily="2" charset="-78"/>
               </a:rPr>
               <a:t>وَقَدْ عِشْتُ ذٰلِكَ بِنَفْسِي؛ فَحِينَ نَشَرْتُ فِيدْيُو عَنْ عَادَاتِ العِيدِ فِي الجَزَائِرِ، شَاهَدَهُ آلَافُ الشَّبَابِ مِنْ بُلْدَانٍ مُخْتَلِفَةٍ، وَسَأَلَنِي كَثِيرُونَ عَنْ لُغَتِي وَطَعَامِنَا، فَشَعَرْتُ بِأَنَّ هُوِيَّتِي صَارَتْ جِسْرًا لَا جِدَارًا، وَأَنَّ لُغَتِي كَنْزٌ يَسْتَحِقُّ المُشَارَكَةَ.</a:t>
@@ -10386,6 +10466,7 @@
                   <a:srgbClr val="1F2A37"/>
                 </a:solidFill>
                 <a:latin typeface="Amiri" pitchFamily="2" charset="-78"/>
+                <a:ea typeface="Amiri" pitchFamily="2" charset="-78"/>
                 <a:cs typeface="Amiri" pitchFamily="2" charset="-78"/>
               </a:rPr>
               <a:t>لِذٰلِكَ أَرَى أَنَّ الهُوِيَّةَ وَالمُوَاطَنَةَ العَالَمِيَّةَ لَا تَتَنَاقَضَانِ، بَلْ تُكْمِلُ إِحْدَاهُمَا الأُخْرَى، كَمَا تُكْمِلُ الجُذُورُ الأَغْصَانَ. فَإِذَا عَرَفْنَا جُذُورَنَا جَيِّدًا، فَسَنَمُدُّ أَغْصَانَنَا إِلَى العَالَمِ دُونَ خَوْفٍ أَوْ خَجَلٍ.</a:t>
@@ -10484,11 +10565,12 @@
               <a:buNone/>
             </a:pPr>
             <a:r>
-              <a:rPr lang="en-US" sz="950" b="1" dirty="0">
+              <a:rPr lang="ar-SA" sz="950" b="1" dirty="0">
                 <a:solidFill>
                   <a:srgbClr val="FFFFFF"/>
                 </a:solidFill>
                 <a:latin typeface="Calibri" pitchFamily="34" charset="0"/>
+                <a:ea typeface="Amiri" pitchFamily="2" charset="-78"/>
                 <a:cs typeface="Amiri" pitchFamily="2" charset="-78"/>
               </a:rPr>
               <a:t>بَيْنَ عَالَمَيْنِ</a:t>
@@ -10549,11 +10631,12 @@
               <a:buNone/>
             </a:pPr>
             <a:r>
-              <a:rPr lang="en-US" sz="950" b="1" dirty="0">
+              <a:rPr lang="ar-SA" sz="950" b="1" dirty="0">
                 <a:solidFill>
                   <a:srgbClr val="FFFFFF"/>
                 </a:solidFill>
                 <a:latin typeface="Calibri" pitchFamily="34" charset="0"/>
+                <a:ea typeface="Amiri" pitchFamily="2" charset="-78"/>
                 <a:cs typeface="Amiri" pitchFamily="2" charset="-78"/>
               </a:rPr>
               <a:t>مِمَّا قَدْ يُضْعِفُ</a:t>
@@ -10614,11 +10697,12 @@
               <a:buNone/>
             </a:pPr>
             <a:r>
-              <a:rPr lang="en-US" sz="950" b="1" dirty="0">
+              <a:rPr lang="ar-SA" sz="950" b="1" dirty="0">
                 <a:solidFill>
                   <a:srgbClr val="FFFFFF"/>
                 </a:solidFill>
                 <a:latin typeface="Calibri" pitchFamily="34" charset="0"/>
+                <a:ea typeface="Amiri" pitchFamily="2" charset="-78"/>
                 <a:cs typeface="Amiri" pitchFamily="2" charset="-78"/>
               </a:rPr>
               <a:t>جِسْرًا لَا جِدَارًا</a:t>
@@ -10679,11 +10763,12 @@
               <a:buNone/>
             </a:pPr>
             <a:r>
-              <a:rPr lang="en-US" sz="950" b="1" dirty="0">
+              <a:rPr lang="ar-SA" sz="950" b="1" dirty="0">
                 <a:solidFill>
                   <a:srgbClr val="FFFFFF"/>
                 </a:solidFill>
                 <a:latin typeface="Calibri" pitchFamily="34" charset="0"/>
+                <a:ea typeface="Amiri" pitchFamily="2" charset="-78"/>
                 <a:cs typeface="Amiri" pitchFamily="2" charset="-78"/>
               </a:rPr>
               <a:t>لَا تَتَنَاقَضَانِ، بَلْ</a:t>
@@ -10817,6 +10902,7 @@
                   <a:srgbClr val="D4AF37"/>
                 </a:solidFill>
                 <a:latin typeface="Amiri" pitchFamily="2" charset="-78"/>
+                <a:ea typeface="Amiri" pitchFamily="2" charset="-78"/>
                 <a:cs typeface="Amiri" pitchFamily="2" charset="-78"/>
               </a:rPr>
               <a:t>م</a:t>
@@ -11137,6 +11223,7 @@
                   <a:srgbClr val="8A6D1E"/>
                 </a:solidFill>
                 <a:latin typeface="Amiri" pitchFamily="2" charset="-78"/>
+                <a:ea typeface="Amiri" pitchFamily="2" charset="-78"/>
                 <a:cs typeface="Amiri" pitchFamily="2" charset="-78"/>
               </a:rPr>
               <a:t>قَيِّمْ عَمَلَكَ</a:t>
@@ -12381,6 +12468,7 @@
                   <a:srgbClr val="FFFFFF"/>
                 </a:solidFill>
                 <a:latin typeface="Amiri" pitchFamily="2" charset="-78"/>
+                <a:ea typeface="Amiri" pitchFamily="2" charset="-78"/>
                 <a:cs typeface="Amiri" pitchFamily="2" charset="-78"/>
               </a:rPr>
               <a:t>أَحْسَنْتُمْ! إِلَى اللِّقَاءِ</a:t>
@@ -12533,6 +12621,7 @@
                   <a:srgbClr val="D4AF37"/>
                 </a:solidFill>
                 <a:latin typeface="Amiri" pitchFamily="2" charset="-78"/>
+                <a:ea typeface="Amiri" pitchFamily="2" charset="-78"/>
                 <a:cs typeface="Amiri" pitchFamily="2" charset="-78"/>
               </a:rPr>
               <a:t>وَرْشَةُ التَّدْرِيبِ</a:t>
@@ -12666,6 +12755,7 @@
                   <a:srgbClr val="D4AF37"/>
                 </a:solidFill>
                 <a:latin typeface="Amiri" pitchFamily="2" charset="-78"/>
+                <a:ea typeface="Amiri" pitchFamily="2" charset="-78"/>
                 <a:cs typeface="Amiri" pitchFamily="2" charset="-78"/>
               </a:rPr>
               <a:t>م</a:t>
@@ -12986,6 +13076,7 @@
                   <a:srgbClr val="8A6D1E"/>
                 </a:solidFill>
                 <a:latin typeface="Amiri" pitchFamily="2" charset="-78"/>
+                <a:ea typeface="Amiri" pitchFamily="2" charset="-78"/>
                 <a:cs typeface="Amiri" pitchFamily="2" charset="-78"/>
               </a:rPr>
               <a:t>آدَابُ الصَّفِّ</a:t>
@@ -14517,6 +14608,7 @@
                   <a:srgbClr val="D4AF37"/>
                 </a:solidFill>
                 <a:latin typeface="Amiri" pitchFamily="2" charset="-78"/>
+                <a:ea typeface="Amiri" pitchFamily="2" charset="-78"/>
                 <a:cs typeface="Amiri" pitchFamily="2" charset="-78"/>
               </a:rPr>
               <a:t>م</a:t>
@@ -14837,6 +14929,7 @@
                   <a:srgbClr val="8A6D1E"/>
                 </a:solidFill>
                 <a:latin typeface="Amiri" pitchFamily="2" charset="-78"/>
+                <a:ea typeface="Amiri" pitchFamily="2" charset="-78"/>
                 <a:cs typeface="Amiri" pitchFamily="2" charset="-78"/>
               </a:rPr>
               <a:t>خَرِيطَةُ الوَرْشَةِ</a:t>
@@ -15151,6 +15244,7 @@
                   <a:srgbClr val="1B3B6F"/>
                 </a:solidFill>
                 <a:latin typeface="Amiri" pitchFamily="2" charset="-78"/>
+                <a:ea typeface="Amiri" pitchFamily="2" charset="-78"/>
                 <a:cs typeface="Amiri" pitchFamily="2" charset="-78"/>
               </a:rPr>
               <a:t>كَيْفَ</a:t>
@@ -15427,6 +15521,7 @@
                   <a:srgbClr val="1E6B52"/>
                 </a:solidFill>
                 <a:latin typeface="Amiri" pitchFamily="2" charset="-78"/>
+                <a:ea typeface="Amiri" pitchFamily="2" charset="-78"/>
                 <a:cs typeface="Amiri" pitchFamily="2" charset="-78"/>
               </a:rPr>
               <a:t>الاسْتِمَارَةُ</a:t>
@@ -15703,6 +15798,7 @@
                   <a:srgbClr val="1E6B52"/>
                 </a:solidFill>
                 <a:latin typeface="Amiri" pitchFamily="2" charset="-78"/>
+                <a:ea typeface="Amiri" pitchFamily="2" charset="-78"/>
                 <a:cs typeface="Amiri" pitchFamily="2" charset="-78"/>
               </a:rPr>
               <a:t>الرِّسَالَةُ</a:t>
@@ -15979,6 +16075,7 @@
                   <a:srgbClr val="1E6B52"/>
                 </a:solidFill>
                 <a:latin typeface="Amiri" pitchFamily="2" charset="-78"/>
+                <a:ea typeface="Amiri" pitchFamily="2" charset="-78"/>
                 <a:cs typeface="Amiri" pitchFamily="2" charset="-78"/>
               </a:rPr>
               <a:t>المَقَالُ</a:t>
@@ -16255,6 +16352,7 @@
                   <a:srgbClr val="8A6D1E"/>
                 </a:solidFill>
                 <a:latin typeface="Amiri" pitchFamily="2" charset="-78"/>
+                <a:ea typeface="Amiri" pitchFamily="2" charset="-78"/>
                 <a:cs typeface="Amiri" pitchFamily="2" charset="-78"/>
               </a:rPr>
               <a:t>قَيِّمْ</a:t>
@@ -16498,6 +16596,7 @@
                   <a:srgbClr val="D4AF37"/>
                 </a:solidFill>
                 <a:latin typeface="Amiri" pitchFamily="2" charset="-78"/>
+                <a:ea typeface="Amiri" pitchFamily="2" charset="-78"/>
                 <a:cs typeface="Amiri" pitchFamily="2" charset="-78"/>
               </a:rPr>
               <a:t>م</a:t>
@@ -16818,6 +16917,7 @@
                   <a:srgbClr val="8A6D1E"/>
                 </a:solidFill>
                 <a:latin typeface="Amiri" pitchFamily="2" charset="-78"/>
+                <a:ea typeface="Amiri" pitchFamily="2" charset="-78"/>
                 <a:cs typeface="Amiri" pitchFamily="2" charset="-78"/>
               </a:rPr>
               <a:t>امْتِحَانُ الكِتَابَةِ</a:t>
@@ -17442,6 +17542,7 @@
                   <a:srgbClr val="1B3B6F"/>
                 </a:solidFill>
                 <a:latin typeface="Amiri" pitchFamily="2" charset="-78"/>
+                <a:ea typeface="Amiri" pitchFamily="2" charset="-78"/>
                 <a:cs typeface="Amiri" pitchFamily="2" charset="-78"/>
               </a:rPr>
               <a:t>كَانَتِ الأُمْسِيَةُ مُتْعِبَةً، وَمَعَ ذٰلِكَ أَحْبَبْتُهَا كَثِيرًا</a:t>
@@ -17541,6 +17642,7 @@
                   <a:srgbClr val="1B3B6F"/>
                 </a:solidFill>
                 <a:latin typeface="Amiri" pitchFamily="2" charset="-78"/>
+                <a:ea typeface="Amiri" pitchFamily="2" charset="-78"/>
                 <a:cs typeface="Amiri" pitchFamily="2" charset="-78"/>
               </a:rPr>
               <a:t>كُنْتُ أَتَكَلَّمُ … أَمَّا الآنَ فَأَتَكَلَّمُ …</a:t>
@@ -17640,6 +17742,7 @@
                   <a:srgbClr val="1B3B6F"/>
                 </a:solidFill>
                 <a:latin typeface="Amiri" pitchFamily="2" charset="-78"/>
+                <a:ea typeface="Amiri" pitchFamily="2" charset="-78"/>
                 <a:cs typeface="Amiri" pitchFamily="2" charset="-78"/>
               </a:rPr>
               <a:t>إِذَا نَجَحْتُ فِي ذٰلِكَ، فَسَأُسَاعِدُ …</a:t>
@@ -17811,6 +17914,7 @@
                   <a:srgbClr val="D4AF37"/>
                 </a:solidFill>
                 <a:latin typeface="Amiri" pitchFamily="2" charset="-78"/>
+                <a:ea typeface="Amiri" pitchFamily="2" charset="-78"/>
                 <a:cs typeface="Amiri" pitchFamily="2" charset="-78"/>
               </a:rPr>
               <a:t>م</a:t>
@@ -18131,6 +18235,7 @@
                   <a:srgbClr val="8A6D1E"/>
                 </a:solidFill>
                 <a:latin typeface="Amiri" pitchFamily="2" charset="-78"/>
+                <a:ea typeface="Amiri" pitchFamily="2" charset="-78"/>
                 <a:cs typeface="Amiri" pitchFamily="2" charset="-78"/>
               </a:rPr>
               <a:t>اسْتِمَارَةُ المُلْتَقَى الدُّوَلِيِّ لِلشَّبَابِ</a:t>
@@ -18487,6 +18592,7 @@
                   <a:srgbClr val="1B3B6F"/>
                 </a:solidFill>
                 <a:latin typeface="Amiri" pitchFamily="2" charset="-78"/>
+                <a:ea typeface="Amiri" pitchFamily="2" charset="-78"/>
                 <a:cs typeface="Amiri" pitchFamily="2" charset="-78"/>
               </a:rPr>
               <a:t>الاسْمُ</a:t>
@@ -18731,6 +18837,7 @@
                   <a:srgbClr val="1B3B6F"/>
                 </a:solidFill>
                 <a:latin typeface="Amiri" pitchFamily="2" charset="-78"/>
+                <a:ea typeface="Amiri" pitchFamily="2" charset="-78"/>
                 <a:cs typeface="Amiri" pitchFamily="2" charset="-78"/>
               </a:rPr>
               <a:t>الجِنْسِيَّةُ</a:t>
@@ -18975,6 +19082,7 @@
                   <a:srgbClr val="1B3B6F"/>
                 </a:solidFill>
                 <a:latin typeface="Amiri" pitchFamily="2" charset="-78"/>
+                <a:ea typeface="Amiri" pitchFamily="2" charset="-78"/>
                 <a:cs typeface="Amiri" pitchFamily="2" charset="-78"/>
               </a:rPr>
               <a:t>اللُّغَاتُ</a:t>
@@ -19219,6 +19327,7 @@
                   <a:srgbClr val="1B3B6F"/>
                 </a:solidFill>
                 <a:latin typeface="Amiri" pitchFamily="2" charset="-78"/>
+                <a:ea typeface="Amiri" pitchFamily="2" charset="-78"/>
                 <a:cs typeface="Amiri" pitchFamily="2" charset="-78"/>
               </a:rPr>
               <a:t>عَادَةٌ مِنْ ثَقَافَتِكَ</a:t>
@@ -19463,6 +19572,7 @@
                   <a:srgbClr val="1B3B6F"/>
                 </a:solidFill>
                 <a:latin typeface="Amiri" pitchFamily="2" charset="-78"/>
+                <a:ea typeface="Amiri" pitchFamily="2" charset="-78"/>
                 <a:cs typeface="Amiri" pitchFamily="2" charset="-78"/>
               </a:rPr>
               <a:t>عِيدٌ تُحِبُّهُ</a:t>
@@ -19707,6 +19817,7 @@
                   <a:srgbClr val="1B3B6F"/>
                 </a:solidFill>
                 <a:latin typeface="Amiri" pitchFamily="2" charset="-78"/>
+                <a:ea typeface="Amiri" pitchFamily="2" charset="-78"/>
                 <a:cs typeface="Amiri" pitchFamily="2" charset="-78"/>
               </a:rPr>
               <a:t>بَلَدٌ زُرْتَهُ</a:t>
@@ -19951,6 +20062,7 @@
                   <a:srgbClr val="1B3B6F"/>
                 </a:solidFill>
                 <a:latin typeface="Amiri" pitchFamily="2" charset="-78"/>
+                <a:ea typeface="Amiri" pitchFamily="2" charset="-78"/>
                 <a:cs typeface="Amiri" pitchFamily="2" charset="-78"/>
               </a:rPr>
               <a:t>قَضِيَّةٌ عَالَمِيَّةٌ تُهِمُّكَ</a:t>
@@ -20130,6 +20242,7 @@
                   <a:srgbClr val="1B3B6F"/>
                 </a:solidFill>
                 <a:latin typeface="Amiri" pitchFamily="2" charset="-78"/>
+                <a:ea typeface="Amiri" pitchFamily="2" charset="-78"/>
                 <a:cs typeface="Amiri" pitchFamily="2" charset="-78"/>
               </a:rPr>
               <a:t>جُمْلَةٌ: مَاذَا تَعَلَّمْتَ مِنَ العَيْشِ بَيْنَ ثَقَافَتَيْنِ؟</a:t>
@@ -20339,6 +20452,7 @@
                   <a:srgbClr val="D4AF37"/>
                 </a:solidFill>
                 <a:latin typeface="Amiri" pitchFamily="2" charset="-78"/>
+                <a:ea typeface="Amiri" pitchFamily="2" charset="-78"/>
                 <a:cs typeface="Amiri" pitchFamily="2" charset="-78"/>
               </a:rPr>
               <a:t>م</a:t>
@@ -20659,6 +20773,7 @@
                   <a:srgbClr val="8A6D1E"/>
                 </a:solidFill>
                 <a:latin typeface="Amiri" pitchFamily="2" charset="-78"/>
+                <a:ea typeface="Amiri" pitchFamily="2" charset="-78"/>
                 <a:cs typeface="Amiri" pitchFamily="2" charset="-78"/>
               </a:rPr>
               <a:t>نَمُوذَجُ الإِجَابَةِ</a:t>
@@ -20977,6 +21092,7 @@
                   <a:srgbClr val="1B3B6F"/>
                 </a:solidFill>
                 <a:latin typeface="Amiri" pitchFamily="2" charset="-78"/>
+                <a:ea typeface="Amiri" pitchFamily="2" charset="-78"/>
                 <a:cs typeface="Amiri" pitchFamily="2" charset="-78"/>
               </a:rPr>
               <a:t>يَاسِينُ بَلْقَاسِمَ</a:t>
@@ -21015,6 +21131,7 @@
                   <a:srgbClr val="1B3B6F"/>
                 </a:solidFill>
                 <a:latin typeface="Amiri" pitchFamily="2" charset="-78"/>
+                <a:ea typeface="Amiri" pitchFamily="2" charset="-78"/>
                 <a:cs typeface="Amiri" pitchFamily="2" charset="-78"/>
               </a:rPr>
               <a:t>الاسْمُ</a:t>
@@ -21156,6 +21273,7 @@
                   <a:srgbClr val="1B3B6F"/>
                 </a:solidFill>
                 <a:latin typeface="Amiri" pitchFamily="2" charset="-78"/>
+                <a:ea typeface="Amiri" pitchFamily="2" charset="-78"/>
                 <a:cs typeface="Amiri" pitchFamily="2" charset="-78"/>
               </a:rPr>
               <a:t>جَزَائِرِيٌّ وَبَرِيطَانِيٌّ</a:t>
@@ -21194,6 +21312,7 @@
                   <a:srgbClr val="1B3B6F"/>
                 </a:solidFill>
                 <a:latin typeface="Amiri" pitchFamily="2" charset="-78"/>
+                <a:ea typeface="Amiri" pitchFamily="2" charset="-78"/>
                 <a:cs typeface="Amiri" pitchFamily="2" charset="-78"/>
               </a:rPr>
               <a:t>الجِنْسِيَّةُ</a:t>
@@ -21335,6 +21454,7 @@
                   <a:srgbClr val="1B3B6F"/>
                 </a:solidFill>
                 <a:latin typeface="Amiri" pitchFamily="2" charset="-78"/>
+                <a:ea typeface="Amiri" pitchFamily="2" charset="-78"/>
                 <a:cs typeface="Amiri" pitchFamily="2" charset="-78"/>
               </a:rPr>
               <a:t>العَرَبِيَّةُ وَالفَرَنْسِيَّةُ وَالإِنْجْلِيزِيَّةُ</a:t>
@@ -21373,6 +21493,7 @@
                   <a:srgbClr val="1B3B6F"/>
                 </a:solidFill>
                 <a:latin typeface="Amiri" pitchFamily="2" charset="-78"/>
+                <a:ea typeface="Amiri" pitchFamily="2" charset="-78"/>
                 <a:cs typeface="Amiri" pitchFamily="2" charset="-78"/>
               </a:rPr>
               <a:t>اللُّغَاتُ</a:t>
@@ -21514,6 +21635,7 @@
                   <a:srgbClr val="1B3B6F"/>
                 </a:solidFill>
                 <a:latin typeface="Amiri" pitchFamily="2" charset="-78"/>
+                <a:ea typeface="Amiri" pitchFamily="2" charset="-78"/>
                 <a:cs typeface="Amiri" pitchFamily="2" charset="-78"/>
               </a:rPr>
               <a:t>تَقْدِيمُ الشَّايِ بِالنَّعْنَاعِ</a:t>
@@ -21552,6 +21674,7 @@
                   <a:srgbClr val="1B3B6F"/>
                 </a:solidFill>
                 <a:latin typeface="Amiri" pitchFamily="2" charset="-78"/>
+                <a:ea typeface="Amiri" pitchFamily="2" charset="-78"/>
                 <a:cs typeface="Amiri" pitchFamily="2" charset="-78"/>
               </a:rPr>
               <a:t>عَادَةٌ مِنْ ثَقَافَتِكَ</a:t>
@@ -21693,6 +21816,7 @@
                   <a:srgbClr val="1B3B6F"/>
                 </a:solidFill>
                 <a:latin typeface="Amiri" pitchFamily="2" charset="-78"/>
+                <a:ea typeface="Amiri" pitchFamily="2" charset="-78"/>
                 <a:cs typeface="Amiri" pitchFamily="2" charset="-78"/>
               </a:rPr>
               <a:t>عِيدُ الأَضْحَى</a:t>
@@ -21731,6 +21855,7 @@
                   <a:srgbClr val="1B3B6F"/>
                 </a:solidFill>
                 <a:latin typeface="Amiri" pitchFamily="2" charset="-78"/>
+                <a:ea typeface="Amiri" pitchFamily="2" charset="-78"/>
                 <a:cs typeface="Amiri" pitchFamily="2" charset="-78"/>
               </a:rPr>
               <a:t>عِيدٌ تُحِبُّهُ</a:t>
@@ -21872,6 +21997,7 @@
                   <a:srgbClr val="1B3B6F"/>
                 </a:solidFill>
                 <a:latin typeface="Amiri" pitchFamily="2" charset="-78"/>
+                <a:ea typeface="Amiri" pitchFamily="2" charset="-78"/>
                 <a:cs typeface="Amiri" pitchFamily="2" charset="-78"/>
               </a:rPr>
               <a:t>المَغْرِبُ</a:t>
@@ -21910,6 +22036,7 @@
                   <a:srgbClr val="1B3B6F"/>
                 </a:solidFill>
                 <a:latin typeface="Amiri" pitchFamily="2" charset="-78"/>
+                <a:ea typeface="Amiri" pitchFamily="2" charset="-78"/>
                 <a:cs typeface="Amiri" pitchFamily="2" charset="-78"/>
               </a:rPr>
               <a:t>بَلَدٌ زُرْتَهُ</a:t>
@@ -22051,6 +22178,7 @@
                   <a:srgbClr val="1B3B6F"/>
                 </a:solidFill>
                 <a:latin typeface="Amiri" pitchFamily="2" charset="-78"/>
+                <a:ea typeface="Amiri" pitchFamily="2" charset="-78"/>
                 <a:cs typeface="Amiri" pitchFamily="2" charset="-78"/>
               </a:rPr>
               <a:t>التَّعْلِيمُ لِلَّاجِئِينَ</a:t>
@@ -22089,6 +22217,7 @@
                   <a:srgbClr val="1B3B6F"/>
                 </a:solidFill>
                 <a:latin typeface="Amiri" pitchFamily="2" charset="-78"/>
+                <a:ea typeface="Amiri" pitchFamily="2" charset="-78"/>
                 <a:cs typeface="Amiri" pitchFamily="2" charset="-78"/>
               </a:rPr>
               <a:t>قَضِيَّةٌ عَالَمِيَّةٌ تُهِمُّكَ</a:t>
@@ -22230,6 +22359,7 @@
                   <a:srgbClr val="1B3B6F"/>
                 </a:solidFill>
                 <a:latin typeface="Amiri" pitchFamily="2" charset="-78"/>
+                <a:ea typeface="Amiri" pitchFamily="2" charset="-78"/>
                 <a:cs typeface="Amiri" pitchFamily="2" charset="-78"/>
               </a:rPr>
               <a:t>كُنْتُ أَخْجَلُ مِنِ اخْتِلَافِي، أَمَّا الآنَ فَأَرَاهُ جِسْرًا بَيْنَ النَّاسِ.</a:t>
@@ -22268,6 +22398,7 @@
                   <a:srgbClr val="1B3B6F"/>
                 </a:solidFill>
                 <a:latin typeface="Amiri" pitchFamily="2" charset="-78"/>
+                <a:ea typeface="Amiri" pitchFamily="2" charset="-78"/>
                 <a:cs typeface="Amiri" pitchFamily="2" charset="-78"/>
               </a:rPr>
               <a:t>جُمْلَةٌ: مَاذَا تَعَلَّمْتَ مِنَ العَيْشِ بَيْنَ ثَقَافَتَيْنِ؟</a:t>
@@ -22477,6 +22608,7 @@
                   <a:srgbClr val="D4AF37"/>
                 </a:solidFill>
                 <a:latin typeface="Amiri" pitchFamily="2" charset="-78"/>
+                <a:ea typeface="Amiri" pitchFamily="2" charset="-78"/>
                 <a:cs typeface="Amiri" pitchFamily="2" charset="-78"/>
               </a:rPr>
               <a:t>م</a:t>
@@ -22797,6 +22929,7 @@
                   <a:srgbClr val="8A6D1E"/>
                 </a:solidFill>
                 <a:latin typeface="Amiri" pitchFamily="2" charset="-78"/>
+                <a:ea typeface="Amiri" pitchFamily="2" charset="-78"/>
                 <a:cs typeface="Amiri" pitchFamily="2" charset="-78"/>
               </a:rPr>
               <a:t>الأُمْسِيَةُ الدُّوَلِيَّةُ</a:t>
@@ -23272,6 +23405,7 @@
                   <a:srgbClr val="1B3B6F"/>
                 </a:solidFill>
                 <a:latin typeface="Amiri" pitchFamily="2" charset="-78"/>
+                <a:ea typeface="Amiri" pitchFamily="2" charset="-78"/>
                 <a:cs typeface="Amiri" pitchFamily="2" charset="-78"/>
               </a:rPr>
               <a:t>أَمْسِ نَظَّمْنَا … فِي مَدْرَسَتِي</a:t>
@@ -23348,6 +23482,7 @@
                   <a:srgbClr val="1B3B6F"/>
                 </a:solidFill>
                 <a:latin typeface="Amiri" pitchFamily="2" charset="-78"/>
+                <a:ea typeface="Amiri" pitchFamily="2" charset="-78"/>
                 <a:cs typeface="Amiri" pitchFamily="2" charset="-78"/>
               </a:rPr>
               <a:t>قَدَّمْنَا … وَشَرَحْنَا …</a:t>
@@ -23424,6 +23559,7 @@
                   <a:srgbClr val="1B3B6F"/>
                 </a:solidFill>
                 <a:latin typeface="Amiri" pitchFamily="2" charset="-78"/>
+                <a:ea typeface="Amiri" pitchFamily="2" charset="-78"/>
                 <a:cs typeface="Amiri" pitchFamily="2" charset="-78"/>
               </a:rPr>
               <a:t>… مُتْعِبَةً، وَمَعَ ذٰلِكَ …</a:t>
@@ -23500,6 +23636,7 @@
                   <a:srgbClr val="1B3B6F"/>
                 </a:solidFill>
                 <a:latin typeface="Amiri" pitchFamily="2" charset="-78"/>
+                <a:ea typeface="Amiri" pitchFamily="2" charset="-78"/>
                 <a:cs typeface="Amiri" pitchFamily="2" charset="-78"/>
               </a:rPr>
               <a:t>لِذٰلِكَ سَأُشَارِكُ …</a:t>
@@ -23671,6 +23808,7 @@
                   <a:srgbClr val="D4AF37"/>
                 </a:solidFill>
                 <a:latin typeface="Amiri" pitchFamily="2" charset="-78"/>
+                <a:ea typeface="Amiri" pitchFamily="2" charset="-78"/>
                 <a:cs typeface="Amiri" pitchFamily="2" charset="-78"/>
               </a:rPr>
               <a:t>م</a:t>
@@ -23991,6 +24129,7 @@
                   <a:srgbClr val="8A6D1E"/>
                 </a:solidFill>
                 <a:latin typeface="Amiri" pitchFamily="2" charset="-78"/>
+                <a:ea typeface="Amiri" pitchFamily="2" charset="-78"/>
                 <a:cs typeface="Amiri" pitchFamily="2" charset="-78"/>
               </a:rPr>
               <a:t>نَصُّ السُّؤَالِ</a:t>
@@ -24271,6 +24410,7 @@
                   <a:srgbClr val="1B3B6F"/>
                 </a:solidFill>
                 <a:latin typeface="Amiri" pitchFamily="2" charset="-78"/>
+                <a:ea typeface="Amiri" pitchFamily="2" charset="-78"/>
                 <a:cs typeface="Amiri" pitchFamily="2" charset="-78"/>
               </a:rPr>
               <a:t>اكْتُبْ رِسَالَةً إِلَى صَدِيقِكَ عَنِ الأُمْسِيَةِ الدُّوَلِيَّةِ فِي مَدْرَسَتِكَ (٨٠–٩٠ كَلِمَةً).</a:t>
@@ -24412,6 +24552,7 @@
                   <a:srgbClr val="1B3B6F"/>
                 </a:solidFill>
                 <a:latin typeface="Amiri" pitchFamily="2" charset="-78"/>
+                <a:ea typeface="Amiri" pitchFamily="2" charset="-78"/>
                 <a:cs typeface="Amiri" pitchFamily="2" charset="-78"/>
               </a:rPr>
               <a:t>مَا الحَدَثُ؟ وَمَنْ شَارَكَ فِيهِ؟</a:t>
@@ -24553,6 +24694,7 @@
                   <a:srgbClr val="1B3B6F"/>
                 </a:solidFill>
                 <a:latin typeface="Amiri" pitchFamily="2" charset="-78"/>
+                <a:ea typeface="Amiri" pitchFamily="2" charset="-78"/>
                 <a:cs typeface="Amiri" pitchFamily="2" charset="-78"/>
               </a:rPr>
               <a:t>مَاذَا فَعَلْتَ فِي جَنَاحِكَ؟</a:t>
@@ -24694,6 +24836,7 @@
                   <a:srgbClr val="1B3B6F"/>
                 </a:solidFill>
                 <a:latin typeface="Amiri" pitchFamily="2" charset="-78"/>
+                <a:ea typeface="Amiri" pitchFamily="2" charset="-78"/>
                 <a:cs typeface="Amiri" pitchFamily="2" charset="-78"/>
               </a:rPr>
               <a:t>مَاذَا حَدَثَ أَيْضًا؟ وَمَا رَأْيُكَ؟</a:t>
@@ -24835,6 +24978,7 @@
                   <a:srgbClr val="1B3B6F"/>
                 </a:solidFill>
                 <a:latin typeface="Amiri" pitchFamily="2" charset="-78"/>
+                <a:ea typeface="Amiri" pitchFamily="2" charset="-78"/>
                 <a:cs typeface="Amiri" pitchFamily="2" charset="-78"/>
               </a:rPr>
               <a:t>مَا خِطَطُكَ لِلسَّنَةِ القَادِمَةِ؟ وَاسْأَلْ صَدِيقَكَ سُؤَالًا.</a:t>
@@ -25044,6 +25188,7 @@
                   <a:srgbClr val="D4AF37"/>
                 </a:solidFill>
                 <a:latin typeface="Amiri" pitchFamily="2" charset="-78"/>
+                <a:ea typeface="Amiri" pitchFamily="2" charset="-78"/>
                 <a:cs typeface="Amiri" pitchFamily="2" charset="-78"/>
               </a:rPr>
               <a:t>م</a:t>
@@ -25364,6 +25509,7 @@
                   <a:srgbClr val="8A6D1E"/>
                 </a:solidFill>
                 <a:latin typeface="Amiri" pitchFamily="2" charset="-78"/>
+                <a:ea typeface="Amiri" pitchFamily="2" charset="-78"/>
                 <a:cs typeface="Amiri" pitchFamily="2" charset="-78"/>
               </a:rPr>
               <a:t>قَوَالِبُ الكِتَابَةِ</a:t>
@@ -25644,6 +25790,7 @@
                   <a:srgbClr val="1B3B6F"/>
                 </a:solidFill>
                 <a:latin typeface="Amiri" pitchFamily="2" charset="-78"/>
+                <a:ea typeface="Amiri" pitchFamily="2" charset="-78"/>
                 <a:cs typeface="Amiri" pitchFamily="2" charset="-78"/>
               </a:rPr>
               <a:t>مَرْحَبًا يَا ______ ، كَيْفَ حَالُكَ؟</a:t>
@@ -25850,6 +25997,7 @@
                   <a:srgbClr val="1B3B6F"/>
                 </a:solidFill>
                 <a:latin typeface="Amiri" pitchFamily="2" charset="-78"/>
+                <a:ea typeface="Amiri" pitchFamily="2" charset="-78"/>
                 <a:cs typeface="Amiri" pitchFamily="2" charset="-78"/>
               </a:rPr>
               <a:t>أَمْسِ نَظَّمْنَا ______ ، وَكَانَ هُنَاكَ ______ .</a:t>
@@ -26056,6 +26204,7 @@
                   <a:srgbClr val="1B3B6F"/>
                 </a:solidFill>
                 <a:latin typeface="Amiri" pitchFamily="2" charset="-78"/>
+                <a:ea typeface="Amiri" pitchFamily="2" charset="-78"/>
                 <a:cs typeface="Amiri" pitchFamily="2" charset="-78"/>
               </a:rPr>
               <a:t>كُنْتُ فِي جَنَاحِ ______ ، وَقَدَّمْنَا ______ .</a:t>
@@ -26262,6 +26411,7 @@
                   <a:srgbClr val="1B3B6F"/>
                 </a:solidFill>
                 <a:latin typeface="Amiri" pitchFamily="2" charset="-78"/>
+                <a:ea typeface="Amiri" pitchFamily="2" charset="-78"/>
                 <a:cs typeface="Amiri" pitchFamily="2" charset="-78"/>
               </a:rPr>
               <a:t>كَانَتِ الأُمْسِيَةُ ______ ، وَمَعَ ذٰلِكَ ______ .</a:t>
@@ -26468,6 +26618,7 @@
                   <a:srgbClr val="1B3B6F"/>
                 </a:solidFill>
                 <a:latin typeface="Amiri" pitchFamily="2" charset="-78"/>
+                <a:ea typeface="Amiri" pitchFamily="2" charset="-78"/>
                 <a:cs typeface="Amiri" pitchFamily="2" charset="-78"/>
               </a:rPr>
               <a:t>لِذٰلِكَ سَأُشَارِكُ ______ . وَأَنْتَ، ______ ؟</a:t>
@@ -26674,6 +26825,7 @@
                   <a:srgbClr val="1B3B6F"/>
                 </a:solidFill>
                 <a:latin typeface="Amiri" pitchFamily="2" charset="-78"/>
+                <a:ea typeface="Amiri" pitchFamily="2" charset="-78"/>
                 <a:cs typeface="Amiri" pitchFamily="2" charset="-78"/>
               </a:rPr>
               <a:t>إِلَى اللِّقَاءِ، ______</a:t>
@@ -26913,13 +27065,9 @@
     <a:fontScheme name="Office">
       <a:majorFont>
         <a:latin typeface="Calibri Light" panose="020F0302020204030204"/>
-        <a:ea typeface=""/>
-        <a:cs typeface=""/>
-        <a:font script="Jpan" typeface="游ゴシック Light"/>
-        <a:font script="Hang" typeface="맑은 고딕"/>
-        <a:font script="Hans" typeface="等线 Light"/>
-        <a:font script="Hant" typeface="新細明體"/>
-        <a:font script="Arab" typeface="Times New Roman"/>
+        <a:ea typeface="Amiri" pitchFamily="2" charset="-78"/>
+        <a:cs typeface="Amiri" pitchFamily="2" charset="-78"/>
+        <a:font script="Arab" typeface="Amiri"/>
         <a:font script="Hebr" typeface="Times New Roman"/>
         <a:font script="Thai" typeface="Angsana New"/>
         <a:font script="Ethi" typeface="Nyala"/>
@@ -26965,13 +27113,9 @@
       </a:majorFont>
       <a:minorFont>
         <a:latin typeface="Calibri" panose="020F0502020204030204"/>
-        <a:ea typeface=""/>
-        <a:cs typeface=""/>
-        <a:font script="Jpan" typeface="游ゴシック"/>
-        <a:font script="Hang" typeface="맑은 고딕"/>
-        <a:font script="Hans" typeface="等线"/>
-        <a:font script="Hant" typeface="新細明體"/>
-        <a:font script="Arab" typeface="Arial"/>
+        <a:ea typeface="Amiri" pitchFamily="2" charset="-78"/>
+        <a:cs typeface="Amiri" pitchFamily="2" charset="-78"/>
+        <a:font script="Arab" typeface="Amiri"/>
         <a:font script="Hebr" typeface="Arial"/>
         <a:font script="Thai" typeface="Cordia New"/>
         <a:font script="Ethi" typeface="Nyala"/>

--- a/Topic_E/Exam_Practice/TE-L11_Writing_Workshop_Topic_E_Integrated_Communication_Workshop.pptx
+++ b/Topic_E/Exam_Practice/TE-L11_Writing_Workshop_Topic_E_Integrated_Communication_Workshop.pptx
@@ -3848,7 +3848,7 @@
                 <a:solidFill>
                   <a:srgbClr val="FFFFFF"/>
                 </a:solidFill>
-                <a:latin typeface="Calibri" pitchFamily="34" charset="0"/>
+                <a:latin typeface="Amiri" pitchFamily="2" charset="-78"/>
                 <a:ea typeface="Amiri" pitchFamily="2" charset="-78"/>
                 <a:cs typeface="Amiri" pitchFamily="2" charset="-78"/>
               </a:rPr>
@@ -3914,7 +3914,7 @@
                 <a:solidFill>
                   <a:srgbClr val="FFFFFF"/>
                 </a:solidFill>
-                <a:latin typeface="Calibri" pitchFamily="34" charset="0"/>
+                <a:latin typeface="Amiri" pitchFamily="2" charset="-78"/>
                 <a:ea typeface="Amiri" pitchFamily="2" charset="-78"/>
                 <a:cs typeface="Amiri" pitchFamily="2" charset="-78"/>
               </a:rPr>
@@ -3980,7 +3980,7 @@
                 <a:solidFill>
                   <a:srgbClr val="FFFFFF"/>
                 </a:solidFill>
-                <a:latin typeface="Calibri" pitchFamily="34" charset="0"/>
+                <a:latin typeface="Amiri" pitchFamily="2" charset="-78"/>
                 <a:ea typeface="Amiri" pitchFamily="2" charset="-78"/>
                 <a:cs typeface="Amiri" pitchFamily="2" charset="-78"/>
               </a:rPr>
@@ -4046,7 +4046,7 @@
                 <a:solidFill>
                   <a:srgbClr val="FFFFFF"/>
                 </a:solidFill>
-                <a:latin typeface="Calibri" pitchFamily="34" charset="0"/>
+                <a:latin typeface="Amiri" pitchFamily="2" charset="-78"/>
                 <a:ea typeface="Amiri" pitchFamily="2" charset="-78"/>
                 <a:cs typeface="Amiri" pitchFamily="2" charset="-78"/>
               </a:rPr>
@@ -4844,7 +4844,7 @@
                 <a:solidFill>
                   <a:srgbClr val="FFFFFF"/>
                 </a:solidFill>
-                <a:latin typeface="Calibri" pitchFamily="34" charset="0"/>
+                <a:latin typeface="Amiri" pitchFamily="2" charset="-78"/>
                 <a:ea typeface="Amiri" pitchFamily="2" charset="-78"/>
                 <a:cs typeface="Amiri" pitchFamily="2" charset="-78"/>
               </a:rPr>
@@ -4910,7 +4910,7 @@
                 <a:solidFill>
                   <a:srgbClr val="FFFFFF"/>
                 </a:solidFill>
-                <a:latin typeface="Calibri" pitchFamily="34" charset="0"/>
+                <a:latin typeface="Amiri" pitchFamily="2" charset="-78"/>
                 <a:ea typeface="Amiri" pitchFamily="2" charset="-78"/>
                 <a:cs typeface="Amiri" pitchFamily="2" charset="-78"/>
               </a:rPr>
@@ -4976,7 +4976,7 @@
                 <a:solidFill>
                   <a:srgbClr val="FFFFFF"/>
                 </a:solidFill>
-                <a:latin typeface="Calibri" pitchFamily="34" charset="0"/>
+                <a:latin typeface="Amiri" pitchFamily="2" charset="-78"/>
                 <a:ea typeface="Amiri" pitchFamily="2" charset="-78"/>
                 <a:cs typeface="Amiri" pitchFamily="2" charset="-78"/>
               </a:rPr>
@@ -5042,7 +5042,7 @@
                 <a:solidFill>
                   <a:srgbClr val="FFFFFF"/>
                 </a:solidFill>
-                <a:latin typeface="Calibri" pitchFamily="34" charset="0"/>
+                <a:latin typeface="Amiri" pitchFamily="2" charset="-78"/>
                 <a:ea typeface="Amiri" pitchFamily="2" charset="-78"/>
                 <a:cs typeface="Amiri" pitchFamily="2" charset="-78"/>
               </a:rPr>
@@ -8599,7 +8599,7 @@
                 <a:solidFill>
                   <a:srgbClr val="FFFFFF"/>
                 </a:solidFill>
-                <a:latin typeface="Calibri" pitchFamily="34" charset="0"/>
+                <a:latin typeface="Amiri" pitchFamily="2" charset="-78"/>
                 <a:ea typeface="Amiri" pitchFamily="2" charset="-78"/>
                 <a:cs typeface="Amiri" pitchFamily="2" charset="-78"/>
               </a:rPr>
@@ -8665,7 +8665,7 @@
                 <a:solidFill>
                   <a:srgbClr val="FFFFFF"/>
                 </a:solidFill>
-                <a:latin typeface="Calibri" pitchFamily="34" charset="0"/>
+                <a:latin typeface="Amiri" pitchFamily="2" charset="-78"/>
                 <a:ea typeface="Amiri" pitchFamily="2" charset="-78"/>
                 <a:cs typeface="Amiri" pitchFamily="2" charset="-78"/>
               </a:rPr>
@@ -8731,7 +8731,7 @@
                 <a:solidFill>
                   <a:srgbClr val="FFFFFF"/>
                 </a:solidFill>
-                <a:latin typeface="Calibri" pitchFamily="34" charset="0"/>
+                <a:latin typeface="Amiri" pitchFamily="2" charset="-78"/>
                 <a:ea typeface="Amiri" pitchFamily="2" charset="-78"/>
                 <a:cs typeface="Amiri" pitchFamily="2" charset="-78"/>
               </a:rPr>
@@ -8797,7 +8797,7 @@
                 <a:solidFill>
                   <a:srgbClr val="FFFFFF"/>
                 </a:solidFill>
-                <a:latin typeface="Calibri" pitchFamily="34" charset="0"/>
+                <a:latin typeface="Amiri" pitchFamily="2" charset="-78"/>
                 <a:ea typeface="Amiri" pitchFamily="2" charset="-78"/>
                 <a:cs typeface="Amiri" pitchFamily="2" charset="-78"/>
               </a:rPr>
@@ -9584,7 +9584,7 @@
                 <a:solidFill>
                   <a:srgbClr val="FFFFFF"/>
                 </a:solidFill>
-                <a:latin typeface="Calibri" pitchFamily="34" charset="0"/>
+                <a:latin typeface="Amiri" pitchFamily="2" charset="-78"/>
                 <a:ea typeface="Amiri" pitchFamily="2" charset="-78"/>
                 <a:cs typeface="Amiri" pitchFamily="2" charset="-78"/>
               </a:rPr>
@@ -9650,7 +9650,7 @@
                 <a:solidFill>
                   <a:srgbClr val="FFFFFF"/>
                 </a:solidFill>
-                <a:latin typeface="Calibri" pitchFamily="34" charset="0"/>
+                <a:latin typeface="Amiri" pitchFamily="2" charset="-78"/>
                 <a:ea typeface="Amiri" pitchFamily="2" charset="-78"/>
                 <a:cs typeface="Amiri" pitchFamily="2" charset="-78"/>
               </a:rPr>
@@ -9716,7 +9716,7 @@
                 <a:solidFill>
                   <a:srgbClr val="FFFFFF"/>
                 </a:solidFill>
-                <a:latin typeface="Calibri" pitchFamily="34" charset="0"/>
+                <a:latin typeface="Amiri" pitchFamily="2" charset="-78"/>
                 <a:ea typeface="Amiri" pitchFamily="2" charset="-78"/>
                 <a:cs typeface="Amiri" pitchFamily="2" charset="-78"/>
               </a:rPr>
@@ -9782,7 +9782,7 @@
                 <a:solidFill>
                   <a:srgbClr val="FFFFFF"/>
                 </a:solidFill>
-                <a:latin typeface="Calibri" pitchFamily="34" charset="0"/>
+                <a:latin typeface="Amiri" pitchFamily="2" charset="-78"/>
                 <a:ea typeface="Amiri" pitchFamily="2" charset="-78"/>
                 <a:cs typeface="Amiri" pitchFamily="2" charset="-78"/>
               </a:rPr>
@@ -10569,7 +10569,7 @@
                 <a:solidFill>
                   <a:srgbClr val="FFFFFF"/>
                 </a:solidFill>
-                <a:latin typeface="Calibri" pitchFamily="34" charset="0"/>
+                <a:latin typeface="Amiri" pitchFamily="2" charset="-78"/>
                 <a:ea typeface="Amiri" pitchFamily="2" charset="-78"/>
                 <a:cs typeface="Amiri" pitchFamily="2" charset="-78"/>
               </a:rPr>
@@ -10635,7 +10635,7 @@
                 <a:solidFill>
                   <a:srgbClr val="FFFFFF"/>
                 </a:solidFill>
-                <a:latin typeface="Calibri" pitchFamily="34" charset="0"/>
+                <a:latin typeface="Amiri" pitchFamily="2" charset="-78"/>
                 <a:ea typeface="Amiri" pitchFamily="2" charset="-78"/>
                 <a:cs typeface="Amiri" pitchFamily="2" charset="-78"/>
               </a:rPr>
@@ -10701,7 +10701,7 @@
                 <a:solidFill>
                   <a:srgbClr val="FFFFFF"/>
                 </a:solidFill>
-                <a:latin typeface="Calibri" pitchFamily="34" charset="0"/>
+                <a:latin typeface="Amiri" pitchFamily="2" charset="-78"/>
                 <a:ea typeface="Amiri" pitchFamily="2" charset="-78"/>
                 <a:cs typeface="Amiri" pitchFamily="2" charset="-78"/>
               </a:rPr>
@@ -10767,7 +10767,7 @@
                 <a:solidFill>
                   <a:srgbClr val="FFFFFF"/>
                 </a:solidFill>
-                <a:latin typeface="Calibri" pitchFamily="34" charset="0"/>
+                <a:latin typeface="Amiri" pitchFamily="2" charset="-78"/>
                 <a:ea typeface="Amiri" pitchFamily="2" charset="-78"/>
                 <a:cs typeface="Amiri" pitchFamily="2" charset="-78"/>
               </a:rPr>
